--- a/Documents/Original/FlexChroam_Brim_Information_Guide-EN.pptx
+++ b/Documents/Original/FlexChroam_Brim_Information_Guide-EN.pptx
@@ -4608,7 +4608,7 @@
             </a:r>
             <a:r>
               <a:rPr lang="en-US" altLang="ja-JP" sz="1050" dirty="0"/>
-              <a:t>-</a:t>
+              <a:t>/</a:t>
             </a:r>
             <a:r>
               <a:rPr lang="ja-JP" altLang="ja-JP" sz="1050" dirty="0"/>
@@ -4640,7 +4640,7 @@
           <a:p>
             <a:r>
               <a:rPr lang="en-US" altLang="ja-JP" sz="1050" dirty="0"/>
-              <a:t>                       Vvd-.5cyc </a:t>
+              <a:t>                       Vvd/.5cyc </a:t>
             </a:r>
           </a:p>
           <a:p>
@@ -10551,7 +10551,7 @@
             </a:r>
             <a:r>
               <a:rPr lang="en-US" altLang="ja-JP" sz="1050" dirty="0"/>
-              <a:t>-</a:t>
+              <a:t>/</a:t>
             </a:r>
             <a:r>
               <a:rPr lang="ja-JP" altLang="ja-JP" sz="1050" dirty="0"/>
@@ -10583,7 +10583,7 @@
           <a:p>
             <a:r>
               <a:rPr lang="en-US" altLang="ja-JP" sz="1050" dirty="0"/>
-              <a:t>                       Vvd-.5cyc </a:t>
+              <a:t>                       Vvd/.5cyc </a:t>
             </a:r>
           </a:p>
           <a:p>

--- a/Documents/Original/FlexChroam_Brim_Information_Guide-EN.pptx
+++ b/Documents/Original/FlexChroam_Brim_Information_Guide-EN.pptx
@@ -6841,7 +6841,7 @@
                 <a:latin typeface="IBM Plex Sans JP" panose="020B0503050203000203" pitchFamily="50" charset="-128"/>
                 <a:ea typeface="IBM Plex Sans JP" panose="020B0503050203000203" pitchFamily="50" charset="-128"/>
               </a:rPr>
-              <a:t>The inside brim identifies the filament series and family (size).</a:t>
+              <a:t>The inside brim identifies the filament series and size.</a:t>
             </a:r>
             <a:endParaRPr lang="ja-JP" altLang="ja-JP" sz="1050" dirty="0">
               <a:latin typeface="IBM Plex Sans JP" panose="020B0503050203000203" pitchFamily="50" charset="-128"/>
@@ -12727,7 +12727,7 @@
                 <a:latin typeface="IBM Plex Sans JP" panose="020B0503050203000203" pitchFamily="50" charset="-128"/>
                 <a:ea typeface="IBM Plex Sans JP" panose="020B0503050203000203" pitchFamily="50" charset="-128"/>
               </a:rPr>
-              <a:t>The inside brim identifies the filament series and family (size).</a:t>
+              <a:t>The inside brim identifies the filament series and size.</a:t>
             </a:r>
             <a:endParaRPr lang="ja-JP" altLang="ja-JP" sz="1050" dirty="0">
               <a:latin typeface="IBM Plex Sans JP" panose="020B0503050203000203" pitchFamily="50" charset="-128"/>
